--- a/Clinical_Note_Retrieval_System.pptx
+++ b/Clinical_Note_Retrieval_System.pptx
@@ -4716,8 +4716,8 @@
         </p:nvSpPr>
         <p:spPr>
           <a:xfrm>
-            <a:off x="274320" y="6144768"/>
-            <a:ext cx="11612880" cy="502920"/>
+            <a:off x="274320" y="6053328"/>
+            <a:ext cx="11612880" cy="256032"/>
           </a:xfrm>
           <a:prstGeom prst="rect">
             <a:avLst/>
@@ -4759,8 +4759,8 @@
         </p:nvSpPr>
         <p:spPr>
           <a:xfrm>
-            <a:off x="457200" y="6199632"/>
-            <a:ext cx="11247120" cy="384048"/>
+            <a:off x="457200" y="6071616"/>
+            <a:ext cx="11247120" cy="201168"/>
           </a:xfrm>
           <a:prstGeom prst="rect">
             <a:avLst/>
@@ -4776,12 +4776,12 @@
           <a:p>
             <a:pPr algn="l"/>
             <a:r>
-              <a:rPr sz="1000" b="0" i="0">
+              <a:rPr sz="900" b="0" i="0">
                 <a:solidFill>
                   <a:srgbClr val="E86A10"/>
                 </a:solidFill>
               </a:rPr>
-              <a:t>Note: Figures above are estimates based on published benchmarks for similar corpora.  Actual improvement depends on triplet quality and corpus size.  Fine-tuning code scaffolding available in scripts/finetune.py (not included in this build).</a:t>
+              <a:t>Note: Figures above are estimates based on published benchmarks for similar corpora.  Actual improvement depends on triplet quality and corpus size.</a:t>
             </a:r>
           </a:p>
         </p:txBody>
@@ -5474,7 +5474,7 @@
         <p:spPr>
           <a:xfrm>
             <a:off x="274320" y="4023360"/>
-            <a:ext cx="11612880" cy="2468880"/>
+            <a:ext cx="11612880" cy="2286000"/>
           </a:xfrm>
           <a:prstGeom prst="rect">
             <a:avLst/>
@@ -5517,7 +5517,7 @@
         <p:spPr>
           <a:xfrm>
             <a:off x="457200" y="4114800"/>
-            <a:ext cx="11247120" cy="2286000"/>
+            <a:ext cx="11247120" cy="2103120"/>
           </a:xfrm>
           <a:prstGeom prst="rect">
             <a:avLst/>
@@ -7018,8 +7018,8 @@
         </p:nvSpPr>
         <p:spPr>
           <a:xfrm>
-            <a:off x="274320" y="5394960"/>
-            <a:ext cx="11612880" cy="1188720"/>
+            <a:off x="274320" y="5349240"/>
+            <a:ext cx="11612880" cy="960120"/>
           </a:xfrm>
           <a:prstGeom prst="rect">
             <a:avLst/>
@@ -7061,8 +7061,8 @@
         </p:nvSpPr>
         <p:spPr>
           <a:xfrm>
-            <a:off x="457200" y="5458968"/>
-            <a:ext cx="11247120" cy="1051560"/>
+            <a:off x="457200" y="5413248"/>
+            <a:ext cx="11247120" cy="804672"/>
           </a:xfrm>
           <a:prstGeom prst="rect">
             <a:avLst/>
@@ -8199,8 +8199,8 @@
         </p:nvSpPr>
         <p:spPr>
           <a:xfrm>
-            <a:off x="274320" y="4663440"/>
-            <a:ext cx="11612880" cy="1874519"/>
+            <a:off x="274320" y="4572000"/>
+            <a:ext cx="11612880" cy="1737360"/>
           </a:xfrm>
           <a:prstGeom prst="rect">
             <a:avLst/>
@@ -8242,8 +8242,8 @@
         </p:nvSpPr>
         <p:spPr>
           <a:xfrm>
-            <a:off x="457200" y="4736592"/>
-            <a:ext cx="11247120" cy="1737360"/>
+            <a:off x="457200" y="4645152"/>
+            <a:ext cx="11247120" cy="1600200"/>
           </a:xfrm>
           <a:prstGeom prst="rect">
             <a:avLst/>
@@ -8580,7 +8580,7 @@
         <p:spPr>
           <a:xfrm>
             <a:off x="274320" y="1536192"/>
-            <a:ext cx="5303520" cy="5001768"/>
+            <a:ext cx="5303520" cy="4773168"/>
           </a:xfrm>
           <a:prstGeom prst="rect">
             <a:avLst/>
@@ -8623,7 +8623,7 @@
         <p:spPr>
           <a:xfrm>
             <a:off x="384048" y="1627632"/>
-            <a:ext cx="5084064" cy="4864607"/>
+            <a:ext cx="5084064" cy="4636007"/>
           </a:xfrm>
           <a:prstGeom prst="rect">
             <a:avLst/>
@@ -9215,7 +9215,7 @@
         <p:spPr>
           <a:xfrm>
             <a:off x="5852160" y="4187952"/>
-            <a:ext cx="6035040" cy="2350008"/>
+            <a:ext cx="6035040" cy="2121408"/>
           </a:xfrm>
           <a:prstGeom prst="rect">
             <a:avLst/>
@@ -9258,7 +9258,7 @@
         <p:spPr>
           <a:xfrm>
             <a:off x="5961888" y="4279392"/>
-            <a:ext cx="5815583" cy="2212848"/>
+            <a:ext cx="5815583" cy="1984248"/>
           </a:xfrm>
           <a:prstGeom prst="rect">
             <a:avLst/>
@@ -9812,7 +9812,7 @@
         <p:spPr>
           <a:xfrm>
             <a:off x="274320" y="3867912"/>
-            <a:ext cx="3566160" cy="2670048"/>
+            <a:ext cx="3566160" cy="2395728"/>
           </a:xfrm>
           <a:prstGeom prst="rect">
             <a:avLst/>
@@ -9855,7 +9855,7 @@
         <p:spPr>
           <a:xfrm>
             <a:off x="384048" y="3959352"/>
-            <a:ext cx="3346704" cy="2532888"/>
+            <a:ext cx="3346704" cy="2258568"/>
           </a:xfrm>
           <a:prstGeom prst="rect">
             <a:avLst/>
@@ -10032,7 +10032,7 @@
         <p:spPr>
           <a:xfrm>
             <a:off x="4069080" y="3867912"/>
-            <a:ext cx="3931920" cy="2670048"/>
+            <a:ext cx="3931920" cy="2395728"/>
           </a:xfrm>
           <a:prstGeom prst="rect">
             <a:avLst/>
@@ -10075,7 +10075,7 @@
         <p:spPr>
           <a:xfrm>
             <a:off x="4178808" y="3959352"/>
-            <a:ext cx="3712463" cy="2532888"/>
+            <a:ext cx="3712463" cy="2258568"/>
           </a:xfrm>
           <a:prstGeom prst="rect">
             <a:avLst/>
@@ -10252,7 +10252,7 @@
         <p:spPr>
           <a:xfrm>
             <a:off x="8229600" y="3867912"/>
-            <a:ext cx="3657600" cy="2670048"/>
+            <a:ext cx="3657600" cy="2395728"/>
           </a:xfrm>
           <a:prstGeom prst="rect">
             <a:avLst/>
@@ -10295,7 +10295,7 @@
         <p:spPr>
           <a:xfrm>
             <a:off x="8339327" y="3959352"/>
-            <a:ext cx="3438144" cy="2532888"/>
+            <a:ext cx="3438144" cy="2258568"/>
           </a:xfrm>
           <a:prstGeom prst="rect">
             <a:avLst/>
@@ -11098,7 +11098,7 @@
         <p:spPr>
           <a:xfrm>
             <a:off x="274320" y="3319272"/>
-            <a:ext cx="5394960" cy="3218688"/>
+            <a:ext cx="5394960" cy="2944368"/>
           </a:xfrm>
           <a:prstGeom prst="rect">
             <a:avLst/>
@@ -11141,7 +11141,7 @@
         <p:spPr>
           <a:xfrm>
             <a:off x="384048" y="3410712"/>
-            <a:ext cx="5175504" cy="3081528"/>
+            <a:ext cx="5175504" cy="2807208"/>
           </a:xfrm>
           <a:prstGeom prst="rect">
             <a:avLst/>
@@ -11319,7 +11319,7 @@
         <p:spPr>
           <a:xfrm>
             <a:off x="5943600" y="3319272"/>
-            <a:ext cx="5943600" cy="3218688"/>
+            <a:ext cx="5943600" cy="2944368"/>
           </a:xfrm>
           <a:prstGeom prst="rect">
             <a:avLst/>
@@ -11362,7 +11362,7 @@
         <p:spPr>
           <a:xfrm>
             <a:off x="6053328" y="3410712"/>
-            <a:ext cx="5724144" cy="3081528"/>
+            <a:ext cx="5724144" cy="2807208"/>
           </a:xfrm>
           <a:prstGeom prst="rect">
             <a:avLst/>
@@ -13930,7 +13930,7 @@
         </p:nvSpPr>
         <p:spPr>
           <a:xfrm>
-            <a:off x="274320" y="3337560"/>
+            <a:off x="274320" y="3246120"/>
             <a:ext cx="11612880" cy="1371600"/>
           </a:xfrm>
           <a:prstGeom prst="rect">
@@ -13973,7 +13973,7 @@
         </p:nvSpPr>
         <p:spPr>
           <a:xfrm>
-            <a:off x="457200" y="3401568"/>
+            <a:off x="457200" y="3310127"/>
             <a:ext cx="5303520" cy="320040"/>
           </a:xfrm>
           <a:prstGeom prst="rect">
@@ -14008,7 +14008,7 @@
         </p:nvSpPr>
         <p:spPr>
           <a:xfrm>
-            <a:off x="457200" y="3685032"/>
+            <a:off x="457200" y="3593591"/>
             <a:ext cx="5303520" cy="502920"/>
           </a:xfrm>
           <a:prstGeom prst="rect">
@@ -14043,7 +14043,7 @@
         </p:nvSpPr>
         <p:spPr>
           <a:xfrm>
-            <a:off x="5897880" y="3749039"/>
+            <a:off x="5897880" y="3657600"/>
             <a:ext cx="457200" cy="365760"/>
           </a:xfrm>
           <a:prstGeom prst="rect">
@@ -14078,7 +14078,7 @@
         </p:nvSpPr>
         <p:spPr>
           <a:xfrm>
-            <a:off x="6492240" y="3401568"/>
+            <a:off x="6492240" y="3310127"/>
             <a:ext cx="3657600" cy="320040"/>
           </a:xfrm>
           <a:prstGeom prst="rect">
@@ -14113,7 +14113,7 @@
         </p:nvSpPr>
         <p:spPr>
           <a:xfrm>
-            <a:off x="6492240" y="3685032"/>
+            <a:off x="6492240" y="3593591"/>
             <a:ext cx="3657600" cy="502920"/>
           </a:xfrm>
           <a:prstGeom prst="rect">
@@ -14148,7 +14148,7 @@
         </p:nvSpPr>
         <p:spPr>
           <a:xfrm>
-            <a:off x="10332720" y="3657600"/>
+            <a:off x="10332720" y="3566160"/>
             <a:ext cx="1371600" cy="475488"/>
           </a:xfrm>
           <a:prstGeom prst="rect">
@@ -14191,7 +14191,7 @@
         </p:nvSpPr>
         <p:spPr>
           <a:xfrm>
-            <a:off x="10378440" y="3685032"/>
+            <a:off x="10378440" y="3593591"/>
             <a:ext cx="1280160" cy="411480"/>
           </a:xfrm>
           <a:prstGeom prst="rect">
@@ -14237,7 +14237,7 @@
         </p:nvSpPr>
         <p:spPr>
           <a:xfrm>
-            <a:off x="274320" y="4846320"/>
+            <a:off x="274320" y="4663440"/>
             <a:ext cx="11612880" cy="1371600"/>
           </a:xfrm>
           <a:prstGeom prst="rect">
@@ -14280,7 +14280,7 @@
         </p:nvSpPr>
         <p:spPr>
           <a:xfrm>
-            <a:off x="457200" y="4910328"/>
+            <a:off x="457200" y="4727448"/>
             <a:ext cx="5303520" cy="320040"/>
           </a:xfrm>
           <a:prstGeom prst="rect">
@@ -14315,7 +14315,7 @@
         </p:nvSpPr>
         <p:spPr>
           <a:xfrm>
-            <a:off x="457200" y="5193792"/>
+            <a:off x="457200" y="5010912"/>
             <a:ext cx="5303520" cy="502920"/>
           </a:xfrm>
           <a:prstGeom prst="rect">
@@ -14350,7 +14350,7 @@
         </p:nvSpPr>
         <p:spPr>
           <a:xfrm>
-            <a:off x="5897880" y="5257800"/>
+            <a:off x="5897880" y="5074920"/>
             <a:ext cx="457200" cy="365760"/>
           </a:xfrm>
           <a:prstGeom prst="rect">
@@ -14385,7 +14385,7 @@
         </p:nvSpPr>
         <p:spPr>
           <a:xfrm>
-            <a:off x="6492240" y="4910328"/>
+            <a:off x="6492240" y="4727448"/>
             <a:ext cx="3657600" cy="320040"/>
           </a:xfrm>
           <a:prstGeom prst="rect">
@@ -14420,7 +14420,7 @@
         </p:nvSpPr>
         <p:spPr>
           <a:xfrm>
-            <a:off x="6492240" y="5193792"/>
+            <a:off x="6492240" y="5010912"/>
             <a:ext cx="3657600" cy="502920"/>
           </a:xfrm>
           <a:prstGeom prst="rect">
@@ -14455,7 +14455,7 @@
         </p:nvSpPr>
         <p:spPr>
           <a:xfrm>
-            <a:off x="10332720" y="5166359"/>
+            <a:off x="10332720" y="4983479"/>
             <a:ext cx="1371600" cy="475488"/>
           </a:xfrm>
           <a:prstGeom prst="rect">
@@ -14498,7 +14498,7 @@
         </p:nvSpPr>
         <p:spPr>
           <a:xfrm>
-            <a:off x="10378440" y="5193792"/>
+            <a:off x="10378440" y="5010912"/>
             <a:ext cx="1280160" cy="411480"/>
           </a:xfrm>
           <a:prstGeom prst="rect">
@@ -14544,8 +14544,8 @@
         </p:nvSpPr>
         <p:spPr>
           <a:xfrm>
-            <a:off x="274320" y="6355080"/>
-            <a:ext cx="11612880" cy="347472"/>
+            <a:off x="274320" y="6053328"/>
+            <a:ext cx="11612880" cy="256032"/>
           </a:xfrm>
           <a:prstGeom prst="rect">
             <a:avLst/>
@@ -14587,8 +14587,8 @@
         </p:nvSpPr>
         <p:spPr>
           <a:xfrm>
-            <a:off x="457200" y="6400800"/>
-            <a:ext cx="11247120" cy="274320"/>
+            <a:off x="457200" y="6071616"/>
+            <a:ext cx="11247120" cy="219456"/>
           </a:xfrm>
           <a:prstGeom prst="rect">
             <a:avLst/>
@@ -14604,7 +14604,7 @@
           <a:p>
             <a:pPr algn="l"/>
             <a:r>
-              <a:rPr sz="1100" b="0" i="0">
+              <a:rPr sz="1000" b="0" i="0">
                 <a:solidFill>
                   <a:srgbClr val="AACCDD"/>
                 </a:solidFill>

--- a/Clinical_Note_Retrieval_System.pptx
+++ b/Clinical_Note_Retrieval_System.pptx
@@ -4990,7 +4990,7 @@
                   <a:srgbClr val="AACCDD"/>
                 </a:solidFill>
               </a:rPr>
-              <a:t>What are we solving?</a:t>
+              <a:t>Problem 1 — Clinical Note Retrieval System</a:t>
             </a:r>
           </a:p>
         </p:txBody>
@@ -5068,7 +5068,7 @@
                   <a:srgbClr val="FFFFFF"/>
                 </a:solidFill>
               </a:rPr>
-              <a:t>Clinical Challenge</a:t>
+              <a:t>Problem Statement</a:t>
             </a:r>
           </a:p>
         </p:txBody>
@@ -5150,7 +5150,7 @@
                   <a:srgbClr val="0A294A"/>
                 </a:solidFill>
               </a:rPr>
-              <a:t>Doctors need to quickly find relevant past cases</a:t>
+              <a:t>The platform needs to help doctors quickly find</a:t>
             </a:r>
           </a:p>
           <a:p>
@@ -5165,7 +5165,7 @@
                   <a:srgbClr val="0A294A"/>
                 </a:solidFill>
               </a:rPr>
-              <a:t>from a large corpus of clinical notes.</a:t>
+              <a:t>relevant past cases from a large corpus of</a:t>
             </a:r>
           </a:p>
           <a:p>
@@ -5180,7 +5180,7 @@
                   <a:srgbClr val="0A294A"/>
                 </a:solidFill>
               </a:rPr>
-              <a:t/>
+              <a:t>clinical notes.</a:t>
             </a:r>
           </a:p>
           <a:p>
@@ -5195,7 +5195,7 @@
                   <a:srgbClr val="0A294A"/>
                 </a:solidFill>
               </a:rPr>
-              <a:t>A query about 'a diabetic patient with kidney</a:t>
+              <a:t/>
             </a:r>
           </a:p>
           <a:p>
@@ -5210,7 +5210,7 @@
                   <a:srgbClr val="0A294A"/>
                 </a:solidFill>
               </a:rPr>
-              <a:t>complications' must surface CKD+diabetes notes</a:t>
+              <a:t>A doctor types a natural language query and the</a:t>
             </a:r>
           </a:p>
           <a:p>
@@ -5225,7 +5225,52 @@
                   <a:srgbClr val="0A294A"/>
                 </a:solidFill>
               </a:rPr>
-              <a:t>even when exact words differ.</a:t>
+              <a:t>system should surface the most relevant notes.</a:t>
+            </a:r>
+          </a:p>
+          <a:p>
+            <a:pPr algn="l">
+              <a:spcBef>
+                <a:spcPts val="100"/>
+              </a:spcBef>
+            </a:pPr>
+            <a:r>
+              <a:rPr sz="1100" b="0" i="0">
+                <a:solidFill>
+                  <a:srgbClr val="0A294A"/>
+                </a:solidFill>
+              </a:rPr>
+              <a:t/>
+            </a:r>
+          </a:p>
+          <a:p>
+            <a:pPr algn="l">
+              <a:spcBef>
+                <a:spcPts val="100"/>
+              </a:spcBef>
+            </a:pPr>
+            <a:r>
+              <a:rPr sz="1100" b="0" i="0">
+                <a:solidFill>
+                  <a:srgbClr val="0A294A"/>
+                </a:solidFill>
+              </a:rPr>
+              <a:t>The system must understand clinical meaning,</a:t>
+            </a:r>
+          </a:p>
+          <a:p>
+            <a:pPr algn="l">
+              <a:spcBef>
+                <a:spcPts val="100"/>
+              </a:spcBef>
+            </a:pPr>
+            <a:r>
+              <a:rPr sz="1100" b="0" i="0">
+                <a:solidFill>
+                  <a:srgbClr val="0A294A"/>
+                </a:solidFill>
+              </a:rPr>
+              <a:t>not just match keywords.</a:t>
             </a:r>
           </a:p>
         </p:txBody>
@@ -5303,7 +5348,7 @@
                   <a:srgbClr val="FFFFFF"/>
                 </a:solidFill>
               </a:rPr>
-              <a:t>System Requirements</a:t>
+              <a:t>Instructions (Deliverables)</a:t>
             </a:r>
           </a:p>
         </p:txBody>
@@ -5385,7 +5430,7 @@
                   <a:srgbClr val="0A294A"/>
                 </a:solidFill>
               </a:rPr>
-              <a:t>  Semantic retrieval (not keyword matching)</a:t>
+              <a:t>Build a retrieval system (NL query → ranked notes)</a:t>
             </a:r>
           </a:p>
           <a:p>
@@ -5400,7 +5445,7 @@
                   <a:srgbClr val="0A294A"/>
                 </a:solidFill>
               </a:rPr>
-              <a:t>  Embedding model with clinical justification</a:t>
+              <a:t>Use an embedding model — justify your selection</a:t>
             </a:r>
           </a:p>
           <a:p>
@@ -5415,7 +5460,7 @@
                   <a:srgbClr val="0A294A"/>
                 </a:solidFill>
               </a:rPr>
-              <a:t>  LLM layer for concise result summaries</a:t>
+              <a:t>Add an LLM layer for a concise summary</a:t>
             </a:r>
           </a:p>
           <a:p>
@@ -5430,7 +5475,7 @@
                   <a:srgbClr val="0A294A"/>
                 </a:solidFill>
               </a:rPr>
-              <a:t>  Evaluation showing clinically relevant results</a:t>
+              <a:t>Evaluate — clinically relevant, not keyword matches</a:t>
             </a:r>
           </a:p>
           <a:p>
@@ -5445,7 +5490,7 @@
                   <a:srgbClr val="0A294A"/>
                 </a:solidFill>
               </a:rPr>
-              <a:t>  REST API: query in → results + summary out</a:t>
+              <a:t>REST API: accept query, return results + summary</a:t>
             </a:r>
           </a:p>
           <a:p>
@@ -5460,7 +5505,7 @@
                   <a:srgbClr val="0A294A"/>
                 </a:solidFill>
               </a:rPr>
-              <a:t>  (Optional) Fine-tune embedding model</a:t>
+              <a:t>(Optional) Fine-tune embedding model</a:t>
             </a:r>
           </a:p>
         </p:txBody>
@@ -5538,7 +5583,7 @@
                   <a:srgbClr val="007A87"/>
                 </a:solidFill>
               </a:rPr>
-              <a:t>Key Insight</a:t>
+              <a:t>Key Example</a:t>
             </a:r>
           </a:p>
           <a:p>
@@ -5553,7 +5598,7 @@
                   <a:srgbClr val="FFFFFF"/>
                 </a:solidFill>
               </a:rPr>
-              <a:t>Keyword search fails when clinical language varies: 'renal insufficiency' vs 'kidney failure', 'T2DM' vs 'type 2 diabetes'. Dense embedding models project these into the same semantic space, enabling retrieval that mirrors how clinicians actually think.</a:t>
+              <a:t>"A diabetic patient with kidney complications" → should retrieve notes about CKD with diabetes even if the exact words differ. Keyword search fails here; dense embeddings align clinical synonyms in the same semantic space.</a:t>
             </a:r>
           </a:p>
         </p:txBody>
